--- a/ゲーム科1年/00_前期/ゲームプログラミングⅢ/ゲーム数学/座学/16_ベクトルの加法と減法.pptx
+++ b/ゲーム科1年/00_前期/ゲームプログラミングⅢ/ゲーム数学/座学/16_ベクトルの加法と減法.pptx
@@ -265,7 +265,7 @@
           <a:p>
             <a:fld id="{E9CC885B-4903-4D54-9A93-00025F12DED9}" type="datetimeFigureOut">
               <a:rPr kumimoji="1" lang="ja-JP" altLang="en-US" smtClean="0"/>
-              <a:t>2024/10/11</a:t>
+              <a:t>2025/6/26</a:t>
             </a:fld>
             <a:endParaRPr kumimoji="1" lang="ja-JP" altLang="en-US"/>
           </a:p>
@@ -495,7 +495,7 @@
           <a:p>
             <a:fld id="{E9CC885B-4903-4D54-9A93-00025F12DED9}" type="datetimeFigureOut">
               <a:rPr kumimoji="1" lang="ja-JP" altLang="en-US" smtClean="0"/>
-              <a:t>2024/10/11</a:t>
+              <a:t>2025/6/26</a:t>
             </a:fld>
             <a:endParaRPr kumimoji="1" lang="ja-JP" altLang="en-US"/>
           </a:p>
@@ -735,7 +735,7 @@
           <a:p>
             <a:fld id="{E9CC885B-4903-4D54-9A93-00025F12DED9}" type="datetimeFigureOut">
               <a:rPr kumimoji="1" lang="ja-JP" altLang="en-US" smtClean="0"/>
-              <a:t>2024/10/11</a:t>
+              <a:t>2025/6/26</a:t>
             </a:fld>
             <a:endParaRPr kumimoji="1" lang="ja-JP" altLang="en-US"/>
           </a:p>
@@ -965,7 +965,7 @@
           <a:p>
             <a:fld id="{E9CC885B-4903-4D54-9A93-00025F12DED9}" type="datetimeFigureOut">
               <a:rPr kumimoji="1" lang="ja-JP" altLang="en-US" smtClean="0"/>
-              <a:t>2024/10/11</a:t>
+              <a:t>2025/6/26</a:t>
             </a:fld>
             <a:endParaRPr kumimoji="1" lang="ja-JP" altLang="en-US"/>
           </a:p>
@@ -1240,7 +1240,7 @@
           <a:p>
             <a:fld id="{E9CC885B-4903-4D54-9A93-00025F12DED9}" type="datetimeFigureOut">
               <a:rPr kumimoji="1" lang="ja-JP" altLang="en-US" smtClean="0"/>
-              <a:t>2024/10/11</a:t>
+              <a:t>2025/6/26</a:t>
             </a:fld>
             <a:endParaRPr kumimoji="1" lang="ja-JP" altLang="en-US"/>
           </a:p>
@@ -1569,7 +1569,7 @@
           <a:p>
             <a:fld id="{E9CC885B-4903-4D54-9A93-00025F12DED9}" type="datetimeFigureOut">
               <a:rPr kumimoji="1" lang="ja-JP" altLang="en-US" smtClean="0"/>
-              <a:t>2024/10/11</a:t>
+              <a:t>2025/6/26</a:t>
             </a:fld>
             <a:endParaRPr kumimoji="1" lang="ja-JP" altLang="en-US"/>
           </a:p>
@@ -2045,7 +2045,7 @@
           <a:p>
             <a:fld id="{E9CC885B-4903-4D54-9A93-00025F12DED9}" type="datetimeFigureOut">
               <a:rPr kumimoji="1" lang="ja-JP" altLang="en-US" smtClean="0"/>
-              <a:t>2024/10/11</a:t>
+              <a:t>2025/6/26</a:t>
             </a:fld>
             <a:endParaRPr kumimoji="1" lang="ja-JP" altLang="en-US"/>
           </a:p>
@@ -2186,7 +2186,7 @@
           <a:p>
             <a:fld id="{E9CC885B-4903-4D54-9A93-00025F12DED9}" type="datetimeFigureOut">
               <a:rPr kumimoji="1" lang="ja-JP" altLang="en-US" smtClean="0"/>
-              <a:t>2024/10/11</a:t>
+              <a:t>2025/6/26</a:t>
             </a:fld>
             <a:endParaRPr kumimoji="1" lang="ja-JP" altLang="en-US"/>
           </a:p>
@@ -2299,7 +2299,7 @@
           <a:p>
             <a:fld id="{E9CC885B-4903-4D54-9A93-00025F12DED9}" type="datetimeFigureOut">
               <a:rPr kumimoji="1" lang="ja-JP" altLang="en-US" smtClean="0"/>
-              <a:t>2024/10/11</a:t>
+              <a:t>2025/6/26</a:t>
             </a:fld>
             <a:endParaRPr kumimoji="1" lang="ja-JP" altLang="en-US"/>
           </a:p>
@@ -2642,7 +2642,7 @@
           <a:p>
             <a:fld id="{E9CC885B-4903-4D54-9A93-00025F12DED9}" type="datetimeFigureOut">
               <a:rPr kumimoji="1" lang="ja-JP" altLang="en-US" smtClean="0"/>
-              <a:t>2024/10/11</a:t>
+              <a:t>2025/6/26</a:t>
             </a:fld>
             <a:endParaRPr kumimoji="1" lang="ja-JP" altLang="en-US"/>
           </a:p>
@@ -2930,7 +2930,7 @@
           <a:p>
             <a:fld id="{E9CC885B-4903-4D54-9A93-00025F12DED9}" type="datetimeFigureOut">
               <a:rPr kumimoji="1" lang="ja-JP" altLang="en-US" smtClean="0"/>
-              <a:t>2024/10/11</a:t>
+              <a:t>2025/6/26</a:t>
             </a:fld>
             <a:endParaRPr kumimoji="1" lang="ja-JP" altLang="en-US"/>
           </a:p>
@@ -3203,7 +3203,7 @@
           <a:p>
             <a:fld id="{E9CC885B-4903-4D54-9A93-00025F12DED9}" type="datetimeFigureOut">
               <a:rPr kumimoji="1" lang="ja-JP" altLang="en-US" smtClean="0"/>
-              <a:t>2024/10/11</a:t>
+              <a:t>2025/6/26</a:t>
             </a:fld>
             <a:endParaRPr kumimoji="1" lang="ja-JP" altLang="en-US"/>
           </a:p>
@@ -6384,6 +6384,60 @@
       </p:grpSpPr>
       <p:sp>
         <p:nvSpPr>
+          <p:cNvPr id="5" name="四角形: 角を丸くする 4">
+            <a:extLst>
+              <a:ext uri="{FF2B5EF4-FFF2-40B4-BE49-F238E27FC236}">
+                <a16:creationId xmlns:a16="http://schemas.microsoft.com/office/drawing/2014/main" id="{64709C83-8B3E-46C2-9376-481A4056C573}"/>
+              </a:ext>
+            </a:extLst>
+          </p:cNvPr>
+          <p:cNvSpPr/>
+          <p:nvPr/>
+        </p:nvSpPr>
+        <p:spPr>
+          <a:xfrm>
+            <a:off x="330200" y="1710267"/>
+            <a:ext cx="8407399" cy="4655779"/>
+          </a:xfrm>
+          <a:prstGeom prst="roundRect">
+            <a:avLst/>
+          </a:prstGeom>
+          <a:solidFill>
+            <a:schemeClr val="bg1">
+              <a:lumMod val="85000"/>
+            </a:schemeClr>
+          </a:solidFill>
+          <a:ln>
+            <a:noFill/>
+          </a:ln>
+        </p:spPr>
+        <p:style>
+          <a:lnRef idx="2">
+            <a:schemeClr val="accent1">
+              <a:shade val="50000"/>
+            </a:schemeClr>
+          </a:lnRef>
+          <a:fillRef idx="1">
+            <a:schemeClr val="accent1"/>
+          </a:fillRef>
+          <a:effectRef idx="0">
+            <a:schemeClr val="accent1"/>
+          </a:effectRef>
+          <a:fontRef idx="minor">
+            <a:schemeClr val="lt1"/>
+          </a:fontRef>
+        </p:style>
+        <p:txBody>
+          <a:bodyPr rtlCol="0" anchor="ctr"/>
+          <a:lstStyle/>
+          <a:p>
+            <a:pPr algn="ctr"/>
+            <a:endParaRPr kumimoji="1" lang="ja-JP" altLang="en-US"/>
+          </a:p>
+        </p:txBody>
+      </p:sp>
+      <p:sp>
+        <p:nvSpPr>
           <p:cNvPr id="4" name="テキスト ボックス 3">
             <a:extLst>
               <a:ext uri="{FF2B5EF4-FFF2-40B4-BE49-F238E27FC236}">
@@ -8500,8 +8554,8 @@
           </a:p>
         </p:txBody>
       </p:sp>
-      <mc:AlternateContent xmlns:mc="http://schemas.openxmlformats.org/markup-compatibility/2006">
-        <mc:Choice xmlns:a14="http://schemas.microsoft.com/office/drawing/2010/main" Requires="a14">
+      <mc:AlternateContent xmlns:mc="http://schemas.openxmlformats.org/markup-compatibility/2006" xmlns:a14="http://schemas.microsoft.com/office/drawing/2010/main">
+        <mc:Choice Requires="a14">
           <p:sp>
             <p:nvSpPr>
               <p:cNvPr id="6" name="テキスト ボックス 5">
@@ -8859,13 +8913,7 @@
                               <a:rPr lang="en-US" altLang="ja-JP" sz="2400" i="1">
                                 <a:latin typeface="Cambria Math" panose="02040503050406030204" pitchFamily="18" charset="0"/>
                               </a:rPr>
-                              <m:t>2</m:t>
-                            </m:r>
-                            <m:r>
-                              <a:rPr lang="en-US" altLang="ja-JP" sz="2400" i="1">
-                                <a:latin typeface="Cambria Math" panose="02040503050406030204" pitchFamily="18" charset="0"/>
-                              </a:rPr>
-                              <m:t> </m:t>
+                              <m:t>2 </m:t>
                             </m:r>
                           </m:sub>
                         </m:sSub>
@@ -9340,13 +9388,7 @@
                               <a:rPr lang="en-US" altLang="ja-JP" sz="2400" i="1">
                                 <a:latin typeface="Cambria Math" panose="02040503050406030204" pitchFamily="18" charset="0"/>
                               </a:rPr>
-                              <m:t>2</m:t>
-                            </m:r>
-                            <m:r>
-                              <a:rPr lang="en-US" altLang="ja-JP" sz="2400" i="1">
-                                <a:latin typeface="Cambria Math" panose="02040503050406030204" pitchFamily="18" charset="0"/>
-                              </a:rPr>
-                              <m:t> </m:t>
+                              <m:t>2 </m:t>
                             </m:r>
                           </m:sub>
                         </m:sSub>
@@ -9377,13 +9419,7 @@
                               <a:rPr lang="en-US" altLang="ja-JP" sz="2400" i="1">
                                 <a:latin typeface="Cambria Math" panose="02040503050406030204" pitchFamily="18" charset="0"/>
                               </a:rPr>
-                              <m:t>2</m:t>
-                            </m:r>
-                            <m:r>
-                              <a:rPr lang="en-US" altLang="ja-JP" sz="2400" i="1">
-                                <a:latin typeface="Cambria Math" panose="02040503050406030204" pitchFamily="18" charset="0"/>
-                              </a:rPr>
-                              <m:t> </m:t>
+                              <m:t>2 </m:t>
                             </m:r>
                           </m:sub>
                         </m:sSub>
@@ -9656,7 +9692,7 @@
             </p:txBody>
           </p:sp>
         </mc:Choice>
-        <mc:Fallback>
+        <mc:Fallback xmlns="">
           <p:sp>
             <p:nvSpPr>
               <p:cNvPr id="6" name="テキスト ボックス 5">
